--- a/bright-34-bizcard-back.pptx
+++ b/bright-34-bizcard-back.pptx
@@ -3088,20 +3088,12 @@
         <p:nvPr/>
       </p:nvGrpSpPr>
       <p:grpSpPr/>
-      <p:pic>
-        <p:nvPicPr>
-          <p:cNvPr id="2" name="Picture 1" descr="bright-34-bizcard-back.png"/>
-          <p:cNvPicPr>
-            <a:picLocks noChangeAspect="1"/>
-          </p:cNvPicPr>
+      <p:sp>
+        <p:nvSpPr>
+          <p:cNvPr id="2" name="Rectangle 1"/>
+          <p:cNvSpPr/>
           <p:nvPr/>
-        </p:nvPicPr>
-        <p:blipFill>
-          <a:blip r:embed="rId2"/>
-          <a:stretch>
-            <a:fillRect/>
-          </a:stretch>
-        </p:blipFill>
+        </p:nvSpPr>
         <p:spPr>
           <a:xfrm>
             <a:off x="0" y="0"/>
@@ -3110,8 +3102,190 @@
           <a:prstGeom prst="rect">
             <a:avLst/>
           </a:prstGeom>
+          <a:solidFill>
+            <a:srgbClr val="FBFAF7"/>
+          </a:solidFill>
+          <a:ln>
+            <a:noFill/>
+          </a:ln>
+          <a:effectLst/>
         </p:spPr>
-      </p:pic>
+        <p:style>
+          <a:lnRef idx="1">
+            <a:schemeClr val="accent1"/>
+          </a:lnRef>
+          <a:fillRef idx="3">
+            <a:schemeClr val="accent1"/>
+          </a:fillRef>
+          <a:effectRef idx="2">
+            <a:schemeClr val="accent1"/>
+          </a:effectRef>
+          <a:fontRef idx="minor">
+            <a:schemeClr val="lt1"/>
+          </a:fontRef>
+        </p:style>
+        <p:txBody>
+          <a:bodyPr rtlCol="0" anchor="ctr"/>
+          <a:lstStyle/>
+          <a:p>
+            <a:pPr algn="ctr"/>
+          </a:p>
+        </p:txBody>
+      </p:sp>
+      <p:sp>
+        <p:nvSpPr>
+          <p:cNvPr id="3" name="Rectangle 2"/>
+          <p:cNvSpPr/>
+          <p:nvPr/>
+        </p:nvSpPr>
+        <p:spPr>
+          <a:xfrm>
+            <a:off x="4762500" y="2582317"/>
+            <a:ext cx="476250" cy="9525"/>
+          </a:xfrm>
+          <a:prstGeom prst="rect">
+            <a:avLst/>
+          </a:prstGeom>
+          <a:solidFill>
+            <a:srgbClr val="97A98C"/>
+          </a:solidFill>
+          <a:ln>
+            <a:noFill/>
+          </a:ln>
+          <a:effectLst/>
+        </p:spPr>
+        <p:style>
+          <a:lnRef idx="1">
+            <a:schemeClr val="accent1"/>
+          </a:lnRef>
+          <a:fillRef idx="3">
+            <a:schemeClr val="accent1"/>
+          </a:fillRef>
+          <a:effectRef idx="2">
+            <a:schemeClr val="accent1"/>
+          </a:effectRef>
+          <a:fontRef idx="minor">
+            <a:schemeClr val="lt1"/>
+          </a:fontRef>
+        </p:style>
+        <p:txBody>
+          <a:bodyPr rtlCol="0" anchor="ctr"/>
+          <a:lstStyle/>
+          <a:p>
+            <a:pPr algn="ctr"/>
+          </a:p>
+        </p:txBody>
+      </p:sp>
+      <p:sp>
+        <p:nvSpPr>
+          <p:cNvPr id="4" name="TextBox 3"/>
+          <p:cNvSpPr txBox="1"/>
+          <p:nvPr/>
+        </p:nvSpPr>
+        <p:spPr>
+          <a:xfrm>
+            <a:off x="3370064" y="1877467"/>
+            <a:ext cx="5598557" cy="419100"/>
+          </a:xfrm>
+          <a:prstGeom prst="rect">
+            <a:avLst/>
+          </a:prstGeom>
+          <a:noFill/>
+        </p:spPr>
+        <p:txBody>
+          <a:bodyPr wrap="none" anchor="t" lIns="0" rIns="0" tIns="0" bIns="0"/>
+          <a:lstStyle/>
+          <a:p>
+            <a:pPr algn="l"/>
+            <a:r>
+              <a:rPr sz="2850" i="1" b="0">
+                <a:solidFill>
+                  <a:srgbClr val="97A98C"/>
+                </a:solidFill>
+                <a:latin typeface="Cormorant Garamond"/>
+                <a:ea typeface="Cormorant Garamond"/>
+                <a:cs typeface="Cormorant Garamond"/>
+              </a:rPr>
+              <a:t>Modern Living, Austin</a:t>
+            </a:r>
+          </a:p>
+        </p:txBody>
+      </p:sp>
+      <p:sp>
+        <p:nvSpPr>
+          <p:cNvPr id="5" name="TextBox 4"/>
+          <p:cNvSpPr txBox="1"/>
+          <p:nvPr/>
+        </p:nvSpPr>
+        <p:spPr>
+          <a:xfrm>
+            <a:off x="3126864" y="2877592"/>
+            <a:ext cx="3747373" cy="959941"/>
+          </a:xfrm>
+          <a:prstGeom prst="rect">
+            <a:avLst/>
+          </a:prstGeom>
+          <a:noFill/>
+        </p:spPr>
+        <p:txBody>
+          <a:bodyPr wrap="none" anchor="t" lIns="0" rIns="0" tIns="0" bIns="0"/>
+          <a:lstStyle/>
+          <a:p>
+            <a:pPr algn="ctr">
+              <a:lnSpc>
+                <a:spcPct val="240000"/>
+              </a:lnSpc>
+            </a:pPr>
+            <a:r>
+              <a:rPr sz="1050" i="0" b="0" spc="189">
+                <a:solidFill>
+                  <a:srgbClr val="33322E"/>
+                </a:solidFill>
+                <a:latin typeface="Poppins"/>
+                <a:ea typeface="Poppins"/>
+                <a:cs typeface="Poppins"/>
+              </a:rPr>
+              <a:t>(512) 555-0147</a:t>
+            </a:r>
+          </a:p>
+          <a:p>
+            <a:pPr algn="ctr">
+              <a:lnSpc>
+                <a:spcPct val="240000"/>
+              </a:lnSpc>
+            </a:pPr>
+            <a:r>
+              <a:rPr sz="1050" i="0" b="0" spc="189">
+                <a:solidFill>
+                  <a:srgbClr val="33322E"/>
+                </a:solidFill>
+                <a:latin typeface="Poppins"/>
+                <a:ea typeface="Poppins"/>
+                <a:cs typeface="Poppins"/>
+              </a:rPr>
+              <a:t>hello@mayaellison.com</a:t>
+            </a:r>
+          </a:p>
+          <a:p>
+            <a:pPr algn="ctr">
+              <a:lnSpc>
+                <a:spcPct val="240000"/>
+              </a:lnSpc>
+            </a:pPr>
+            <a:r>
+              <a:rPr sz="1050" i="0" b="0" spc="189">
+                <a:solidFill>
+                  <a:srgbClr val="33322E"/>
+                </a:solidFill>
+                <a:latin typeface="Poppins"/>
+                <a:ea typeface="Poppins"/>
+                <a:cs typeface="Poppins"/>
+              </a:rPr>
+              <a:t>mayaellison.com</a:t>
+            </a:r>
+          </a:p>
+        </p:txBody>
+      </p:sp>
     </p:spTree>
   </p:cSld>
   <p:clrMapOvr>
